--- a/assets/powerpoints/module-n1-presenter/C2-faire-repeter.pptx
+++ b/assets/powerpoints/module-n1-presenter/C2-faire-repeter.pptx
@@ -8549,7 +8549,25 @@
                 </a:solidFill>
                 <a:latin typeface="Verdana"/>
               </a:rPr>
-              <a:t>« Salle &lt;b&gt;douze&lt;/b&gt; ? » « Mardi, c'est bien ça ? » En répétant l'information, on donne à la personne l'occasion de corriger — et on n'a plus besoin de deviner.</a:t>
+              <a:t>« Salle </a:t>
+            </a:r>
+            <a:r>
+              <a:rPr sz="2000" b="1" i="0">
+                <a:solidFill>
+                  <a:srgbClr val="4B4F52"/>
+                </a:solidFill>
+                <a:latin typeface="Verdana"/>
+              </a:rPr>
+              <a:t>douze</a:t>
+            </a:r>
+            <a:r>
+              <a:rPr sz="2000" b="0" i="0">
+                <a:solidFill>
+                  <a:srgbClr val="4B4F52"/>
+                </a:solidFill>
+                <a:latin typeface="Verdana"/>
+              </a:rPr>
+              <a:t> ? » « Mardi, c'est bien ça ? » En répétant l'information, on donne à la personne l'occasion de corriger — et on n'a plus besoin de deviner.</a:t>
             </a:r>
           </a:p>
         </p:txBody>
